--- a/Lab Materials/Day 2 - Lab Materials/Activity 2/02_data_explore.pptx
+++ b/Lab Materials/Day 2 - Lab Materials/Activity 2/02_data_explore.pptx
@@ -148,7 +148,7 @@
 <file path=ppt/revisionInfo.xml><?xml version="1.0" encoding="utf-8"?>
 <p1510:revInfo xmlns:a="http://schemas.openxmlformats.org/drawingml/2006/main" xmlns:r="http://schemas.openxmlformats.org/officeDocument/2006/relationships" xmlns:p1510="http://schemas.microsoft.com/office/powerpoint/2015/10/main">
   <p1510:revLst>
-    <p1510:client id="{C4B08A77-B823-48D1-BA74-5F6E3A5BFD29}" v="73" dt="2026-07-19T22:35:25.663"/>
+    <p1510:client id="{1CAD3E9E-82A7-451C-91DA-84736CD59B97}" v="1" dt="2026-07-21T20:04:25.402"/>
   </p1510:revLst>
 </p1510:revInfo>
 </file>
@@ -227,7 +227,7 @@
   <pc:docChgLst>
     <pc:chgData name="ambleic@clemson.edu" userId="43615028507_tp_box_2" providerId="OAuth2" clId="{5F4B9ABB-DEB5-4DC3-A8F9-1752A2D02C85}"/>
     <pc:docChg chg="undo custSel addSld delSld modSld">
-      <pc:chgData name="ambleic@clemson.edu" userId="43615028507_tp_box_2" providerId="OAuth2" clId="{5F4B9ABB-DEB5-4DC3-A8F9-1752A2D02C85}" dt="2026-07-20T12:59:33.878" v="380" actId="20577"/>
+      <pc:chgData name="ambleic@clemson.edu" userId="43615028507_tp_box_2" providerId="OAuth2" clId="{5F4B9ABB-DEB5-4DC3-A8F9-1752A2D02C85}" dt="2026-07-21T20:04:25.402" v="381"/>
       <pc:docMkLst>
         <pc:docMk/>
       </pc:docMkLst>
@@ -336,34 +336,6 @@
             <ac:graphicFrameMk id="3" creationId="{A76CB0E7-0BC7-C4A3-7B28-20CA7A3EAB7D}"/>
           </ac:graphicFrameMkLst>
         </pc:graphicFrameChg>
-      </pc:sldChg>
-      <pc:sldChg chg="modSp del mod">
-        <pc:chgData name="ambleic@clemson.edu" userId="43615028507_tp_box_2" providerId="OAuth2" clId="{5F4B9ABB-DEB5-4DC3-A8F9-1752A2D02C85}" dt="2026-07-19T20:14:14.831" v="189" actId="47"/>
-        <pc:sldMkLst>
-          <pc:docMk/>
-          <pc:sldMk cId="2996833465" sldId="419"/>
-        </pc:sldMkLst>
-      </pc:sldChg>
-      <pc:sldChg chg="modSp del mod">
-        <pc:chgData name="ambleic@clemson.edu" userId="43615028507_tp_box_2" providerId="OAuth2" clId="{5F4B9ABB-DEB5-4DC3-A8F9-1752A2D02C85}" dt="2026-07-19T20:14:15.787" v="190" actId="47"/>
-        <pc:sldMkLst>
-          <pc:docMk/>
-          <pc:sldMk cId="3845656810" sldId="420"/>
-        </pc:sldMkLst>
-      </pc:sldChg>
-      <pc:sldChg chg="del">
-        <pc:chgData name="ambleic@clemson.edu" userId="43615028507_tp_box_2" providerId="OAuth2" clId="{5F4B9ABB-DEB5-4DC3-A8F9-1752A2D02C85}" dt="2026-07-19T20:14:07.675" v="188" actId="47"/>
-        <pc:sldMkLst>
-          <pc:docMk/>
-          <pc:sldMk cId="1833375455" sldId="425"/>
-        </pc:sldMkLst>
-      </pc:sldChg>
-      <pc:sldChg chg="addSp delSp modSp del mod">
-        <pc:chgData name="ambleic@clemson.edu" userId="43615028507_tp_box_2" providerId="OAuth2" clId="{5F4B9ABB-DEB5-4DC3-A8F9-1752A2D02C85}" dt="2026-07-19T20:23:00.757" v="271" actId="47"/>
-        <pc:sldMkLst>
-          <pc:docMk/>
-          <pc:sldMk cId="3886218017" sldId="426"/>
-        </pc:sldMkLst>
       </pc:sldChg>
       <pc:sldChg chg="modSp mod">
         <pc:chgData name="ambleic@clemson.edu" userId="43615028507_tp_box_2" providerId="OAuth2" clId="{5F4B9ABB-DEB5-4DC3-A8F9-1752A2D02C85}" dt="2026-07-19T22:13:53.999" v="353" actId="20577"/>
@@ -627,14 +599,6 @@
           <pc:docMk/>
           <pc:sldMk cId="3015252729" sldId="448"/>
         </pc:sldMkLst>
-        <pc:picChg chg="add del mod">
-          <ac:chgData name="ambleic@clemson.edu" userId="43615028507_tp_box_2" providerId="OAuth2" clId="{5F4B9ABB-DEB5-4DC3-A8F9-1752A2D02C85}" dt="2026-07-19T20:15:20.505" v="244" actId="478"/>
-          <ac:picMkLst>
-            <pc:docMk/>
-            <pc:sldMk cId="3015252729" sldId="448"/>
-            <ac:picMk id="3" creationId="{F642A1A8-0702-F8D0-10C3-42F894873CF7}"/>
-          </ac:picMkLst>
-        </pc:picChg>
       </pc:sldChg>
       <pc:sldChg chg="modSp">
         <pc:chgData name="ambleic@clemson.edu" userId="43615028507_tp_box_2" providerId="OAuth2" clId="{5F4B9ABB-DEB5-4DC3-A8F9-1752A2D02C85}" dt="2026-07-19T22:10:02.713" v="315" actId="20577"/>
@@ -704,27 +668,6 @@
           </ac:spMkLst>
         </pc:spChg>
       </pc:sldChg>
-      <pc:sldChg chg="add del">
-        <pc:chgData name="ambleic@clemson.edu" userId="43615028507_tp_box_2" providerId="OAuth2" clId="{5F4B9ABB-DEB5-4DC3-A8F9-1752A2D02C85}" dt="2026-07-19T20:18:40.738" v="257"/>
-        <pc:sldMkLst>
-          <pc:docMk/>
-          <pc:sldMk cId="757380635" sldId="509"/>
-        </pc:sldMkLst>
-      </pc:sldChg>
-      <pc:sldChg chg="add del">
-        <pc:chgData name="ambleic@clemson.edu" userId="43615028507_tp_box_2" providerId="OAuth2" clId="{5F4B9ABB-DEB5-4DC3-A8F9-1752A2D02C85}" dt="2026-07-19T20:21:05.868" v="263"/>
-        <pc:sldMkLst>
-          <pc:docMk/>
-          <pc:sldMk cId="1124998227" sldId="510"/>
-        </pc:sldMkLst>
-      </pc:sldChg>
-      <pc:sldChg chg="add del">
-        <pc:chgData name="ambleic@clemson.edu" userId="43615028507_tp_box_2" providerId="OAuth2" clId="{5F4B9ABB-DEB5-4DC3-A8F9-1752A2D02C85}" dt="2026-07-19T20:16:59.844" v="246"/>
-        <pc:sldMkLst>
-          <pc:docMk/>
-          <pc:sldMk cId="1212357894" sldId="513"/>
-        </pc:sldMkLst>
-      </pc:sldChg>
       <pc:sldChg chg="add">
         <pc:chgData name="ambleic@clemson.edu" userId="43615028507_tp_box_2" providerId="OAuth2" clId="{5F4B9ABB-DEB5-4DC3-A8F9-1752A2D02C85}" dt="2026-07-19T20:14:03.300" v="187"/>
         <pc:sldMkLst>
@@ -733,11 +676,19 @@
         </pc:sldMkLst>
       </pc:sldChg>
       <pc:sldChg chg="modSp add mod">
-        <pc:chgData name="ambleic@clemson.edu" userId="43615028507_tp_box_2" providerId="OAuth2" clId="{5F4B9ABB-DEB5-4DC3-A8F9-1752A2D02C85}" dt="2026-07-19T20:14:39.604" v="235" actId="1038"/>
+        <pc:chgData name="ambleic@clemson.edu" userId="43615028507_tp_box_2" providerId="OAuth2" clId="{5F4B9ABB-DEB5-4DC3-A8F9-1752A2D02C85}" dt="2026-07-21T20:04:25.402" v="381"/>
         <pc:sldMkLst>
           <pc:docMk/>
           <pc:sldMk cId="1264614451" sldId="515"/>
         </pc:sldMkLst>
+        <pc:spChg chg="mod">
+          <ac:chgData name="ambleic@clemson.edu" userId="43615028507_tp_box_2" providerId="OAuth2" clId="{5F4B9ABB-DEB5-4DC3-A8F9-1752A2D02C85}" dt="2026-07-21T20:04:25.402" v="381"/>
+          <ac:spMkLst>
+            <pc:docMk/>
+            <pc:sldMk cId="1264614451" sldId="515"/>
+            <ac:spMk id="27" creationId="{1B0207FA-97BD-2917-EBDF-A708BDBBCF75}"/>
+          </ac:spMkLst>
+        </pc:spChg>
         <pc:spChg chg="mod">
           <ac:chgData name="ambleic@clemson.edu" userId="43615028507_tp_box_2" providerId="OAuth2" clId="{5F4B9ABB-DEB5-4DC3-A8F9-1752A2D02C85}" dt="2026-07-19T20:14:39.604" v="235" actId="1038"/>
           <ac:spMkLst>
@@ -754,21 +705,6 @@
             <ac:spMk id="84" creationId="{457AC859-6DCC-BE97-86ED-E048D25F6114}"/>
           </ac:spMkLst>
         </pc:spChg>
-      </pc:sldChg>
-      <pc:sldChg chg="modSp add del mod">
-        <pc:chgData name="ambleic@clemson.edu" userId="43615028507_tp_box_2" providerId="OAuth2" clId="{5F4B9ABB-DEB5-4DC3-A8F9-1752A2D02C85}" dt="2026-07-19T20:23:43.652" v="273"/>
-        <pc:sldMkLst>
-          <pc:docMk/>
-          <pc:sldMk cId="3293426146" sldId="516"/>
-        </pc:sldMkLst>
-        <pc:graphicFrameChg chg="modGraphic">
-          <ac:chgData name="ambleic@clemson.edu" userId="43615028507_tp_box_2" providerId="OAuth2" clId="{5F4B9ABB-DEB5-4DC3-A8F9-1752A2D02C85}" dt="2026-07-19T20:16:59.998" v="255"/>
-          <ac:graphicFrameMkLst>
-            <pc:docMk/>
-            <pc:sldMk cId="3293426146" sldId="516"/>
-            <ac:graphicFrameMk id="7" creationId="{67FA3C47-38BF-4381-9A13-2A6F8DC32BCE}"/>
-          </ac:graphicFrameMkLst>
-        </pc:graphicFrameChg>
       </pc:sldChg>
       <pc:sldChg chg="modSp add mod">
         <pc:chgData name="ambleic@clemson.edu" userId="43615028507_tp_box_2" providerId="OAuth2" clId="{5F4B9ABB-DEB5-4DC3-A8F9-1752A2D02C85}" dt="2026-07-19T20:24:59.966" v="287" actId="1035"/>
@@ -800,21 +736,6 @@
             <ac:picMk id="3" creationId="{7ADB0E6B-AEF9-C0F2-3B56-FC08E8CE6061}"/>
           </ac:picMkLst>
         </pc:picChg>
-      </pc:sldChg>
-      <pc:sldChg chg="modSp add del mod">
-        <pc:chgData name="ambleic@clemson.edu" userId="43615028507_tp_box_2" providerId="OAuth2" clId="{5F4B9ABB-DEB5-4DC3-A8F9-1752A2D02C85}" dt="2026-07-19T20:22:20.671" v="270"/>
-        <pc:sldMkLst>
-          <pc:docMk/>
-          <pc:sldMk cId="3168812247" sldId="518"/>
-        </pc:sldMkLst>
-        <pc:graphicFrameChg chg="mod modGraphic">
-          <ac:chgData name="ambleic@clemson.edu" userId="43615028507_tp_box_2" providerId="OAuth2" clId="{5F4B9ABB-DEB5-4DC3-A8F9-1752A2D02C85}" dt="2026-07-19T20:21:43.706" v="268"/>
-          <ac:graphicFrameMkLst>
-            <pc:docMk/>
-            <pc:sldMk cId="3168812247" sldId="518"/>
-            <ac:graphicFrameMk id="7" creationId="{00000000-0000-0000-0000-000000000000}"/>
-          </ac:graphicFrameMkLst>
-        </pc:graphicFrameChg>
       </pc:sldChg>
       <pc:sldChg chg="modSp add mod">
         <pc:chgData name="ambleic@clemson.edu" userId="43615028507_tp_box_2" providerId="OAuth2" clId="{5F4B9ABB-DEB5-4DC3-A8F9-1752A2D02C85}" dt="2026-07-19T20:25:14.973" v="290" actId="12788"/>
@@ -965,7 +886,7 @@
           <a:p>
             <a:fld id="{7133437B-B696-42BA-B397-5375F7BFE3F0}" type="datetimeFigureOut">
               <a:rPr lang="en-US" smtClean="0"/>
-              <a:t>7/20/2026</a:t>
+              <a:t>7/21/2026</a:t>
             </a:fld>
             <a:endParaRPr lang="en-US"/>
           </a:p>
@@ -4827,7 +4748,7 @@
           <a:p>
             <a:fld id="{132C2E1B-9D4D-4A6C-9CEE-8FB4CE3AFF37}" type="datetimeFigureOut">
               <a:rPr lang="en-US" smtClean="0"/>
-              <a:t>7/20/2026</a:t>
+              <a:t>7/21/2026</a:t>
             </a:fld>
             <a:endParaRPr lang="en-US"/>
           </a:p>
@@ -5025,7 +4946,7 @@
           <a:p>
             <a:fld id="{132C2E1B-9D4D-4A6C-9CEE-8FB4CE3AFF37}" type="datetimeFigureOut">
               <a:rPr lang="en-US" smtClean="0"/>
-              <a:t>7/20/2026</a:t>
+              <a:t>7/21/2026</a:t>
             </a:fld>
             <a:endParaRPr lang="en-US"/>
           </a:p>
@@ -5233,7 +5154,7 @@
           <a:p>
             <a:fld id="{132C2E1B-9D4D-4A6C-9CEE-8FB4CE3AFF37}" type="datetimeFigureOut">
               <a:rPr lang="en-US" smtClean="0"/>
-              <a:t>7/20/2026</a:t>
+              <a:t>7/21/2026</a:t>
             </a:fld>
             <a:endParaRPr lang="en-US"/>
           </a:p>
@@ -5466,7 +5387,7 @@
           <a:p>
             <a:fld id="{132C2E1B-9D4D-4A6C-9CEE-8FB4CE3AFF37}" type="datetimeFigureOut">
               <a:rPr lang="en-US" smtClean="0"/>
-              <a:t>7/20/2026</a:t>
+              <a:t>7/21/2026</a:t>
             </a:fld>
             <a:endParaRPr lang="en-US"/>
           </a:p>
@@ -5741,7 +5662,7 @@
           <a:p>
             <a:fld id="{132C2E1B-9D4D-4A6C-9CEE-8FB4CE3AFF37}" type="datetimeFigureOut">
               <a:rPr lang="en-US" smtClean="0"/>
-              <a:t>7/20/2026</a:t>
+              <a:t>7/21/2026</a:t>
             </a:fld>
             <a:endParaRPr lang="en-US"/>
           </a:p>
@@ -6006,7 +5927,7 @@
           <a:p>
             <a:fld id="{132C2E1B-9D4D-4A6C-9CEE-8FB4CE3AFF37}" type="datetimeFigureOut">
               <a:rPr lang="en-US" smtClean="0"/>
-              <a:t>7/20/2026</a:t>
+              <a:t>7/21/2026</a:t>
             </a:fld>
             <a:endParaRPr lang="en-US"/>
           </a:p>
@@ -6418,7 +6339,7 @@
           <a:p>
             <a:fld id="{132C2E1B-9D4D-4A6C-9CEE-8FB4CE3AFF37}" type="datetimeFigureOut">
               <a:rPr lang="en-US" smtClean="0"/>
-              <a:t>7/20/2026</a:t>
+              <a:t>7/21/2026</a:t>
             </a:fld>
             <a:endParaRPr lang="en-US"/>
           </a:p>
@@ -6559,7 +6480,7 @@
           <a:p>
             <a:fld id="{132C2E1B-9D4D-4A6C-9CEE-8FB4CE3AFF37}" type="datetimeFigureOut">
               <a:rPr lang="en-US" smtClean="0"/>
-              <a:t>7/20/2026</a:t>
+              <a:t>7/21/2026</a:t>
             </a:fld>
             <a:endParaRPr lang="en-US"/>
           </a:p>
@@ -6672,7 +6593,7 @@
           <a:p>
             <a:fld id="{132C2E1B-9D4D-4A6C-9CEE-8FB4CE3AFF37}" type="datetimeFigureOut">
               <a:rPr lang="en-US" smtClean="0"/>
-              <a:t>7/20/2026</a:t>
+              <a:t>7/21/2026</a:t>
             </a:fld>
             <a:endParaRPr lang="en-US"/>
           </a:p>
@@ -6983,7 +6904,7 @@
           <a:p>
             <a:fld id="{132C2E1B-9D4D-4A6C-9CEE-8FB4CE3AFF37}" type="datetimeFigureOut">
               <a:rPr lang="en-US" smtClean="0"/>
-              <a:t>7/20/2026</a:t>
+              <a:t>7/21/2026</a:t>
             </a:fld>
             <a:endParaRPr lang="en-US"/>
           </a:p>
@@ -7271,7 +7192,7 @@
           <a:p>
             <a:fld id="{132C2E1B-9D4D-4A6C-9CEE-8FB4CE3AFF37}" type="datetimeFigureOut">
               <a:rPr lang="en-US" smtClean="0"/>
-              <a:t>7/20/2026</a:t>
+              <a:t>7/21/2026</a:t>
             </a:fld>
             <a:endParaRPr lang="en-US"/>
           </a:p>
@@ -7512,7 +7433,7 @@
           <a:p>
             <a:fld id="{132C2E1B-9D4D-4A6C-9CEE-8FB4CE3AFF37}" type="datetimeFigureOut">
               <a:rPr lang="en-US" smtClean="0"/>
-              <a:t>7/20/2026</a:t>
+              <a:t>7/21/2026</a:t>
             </a:fld>
             <a:endParaRPr lang="en-US"/>
           </a:p>
@@ -25331,7 +25252,7 @@
                 <a:ea typeface="Trebuchet MS" pitchFamily="34" charset="-122"/>
                 <a:cs typeface="Arial" panose="020B0604020202020204" pitchFamily="34" charset="0"/>
               </a:rPr>
-              <a:t>Incremental Revisions</a:t>
+              <a:t>Refinement</a:t>
             </a:r>
           </a:p>
         </p:txBody>
